--- a/AIandSecurity.pptx
+++ b/AIandSecurity.pptx
@@ -16,14 +16,13 @@
     <p:sldId id="323" r:id="rId10"/>
     <p:sldId id="334" r:id="rId11"/>
     <p:sldId id="333" r:id="rId12"/>
-    <p:sldId id="324" r:id="rId13"/>
-    <p:sldId id="330" r:id="rId14"/>
-    <p:sldId id="328" r:id="rId15"/>
-    <p:sldId id="327" r:id="rId16"/>
-    <p:sldId id="332" r:id="rId17"/>
-    <p:sldId id="325" r:id="rId18"/>
-    <p:sldId id="326" r:id="rId19"/>
-    <p:sldId id="335" r:id="rId20"/>
+    <p:sldId id="330" r:id="rId13"/>
+    <p:sldId id="328" r:id="rId14"/>
+    <p:sldId id="327" r:id="rId15"/>
+    <p:sldId id="332" r:id="rId16"/>
+    <p:sldId id="325" r:id="rId17"/>
+    <p:sldId id="326" r:id="rId18"/>
+    <p:sldId id="335" r:id="rId19"/>
   </p:sldIdLst>
   <p:sldSz cx="12192000" cy="6858000"/>
   <p:notesSz cx="6858000" cy="9144000"/>
@@ -279,7 +278,7 @@
           <a:p>
             <a:fld id="{59430995-224F-4A49-BE9D-2F680228FC21}" type="datetimeFigureOut">
               <a:rPr lang="en-US" smtClean="0"/>
-              <a:t>1/20/2026</a:t>
+              <a:t>1/25/2026</a:t>
             </a:fld>
             <a:endParaRPr lang="en-US"/>
           </a:p>
@@ -479,7 +478,7 @@
           <a:p>
             <a:fld id="{59430995-224F-4A49-BE9D-2F680228FC21}" type="datetimeFigureOut">
               <a:rPr lang="en-US" smtClean="0"/>
-              <a:t>1/20/2026</a:t>
+              <a:t>1/25/2026</a:t>
             </a:fld>
             <a:endParaRPr lang="en-US"/>
           </a:p>
@@ -689,7 +688,7 @@
           <a:p>
             <a:fld id="{59430995-224F-4A49-BE9D-2F680228FC21}" type="datetimeFigureOut">
               <a:rPr lang="en-US" smtClean="0"/>
-              <a:t>1/20/2026</a:t>
+              <a:t>1/25/2026</a:t>
             </a:fld>
             <a:endParaRPr lang="en-US"/>
           </a:p>
@@ -889,7 +888,7 @@
           <a:p>
             <a:fld id="{59430995-224F-4A49-BE9D-2F680228FC21}" type="datetimeFigureOut">
               <a:rPr lang="en-US" smtClean="0"/>
-              <a:t>1/20/2026</a:t>
+              <a:t>1/25/2026</a:t>
             </a:fld>
             <a:endParaRPr lang="en-US"/>
           </a:p>
@@ -1165,7 +1164,7 @@
           <a:p>
             <a:fld id="{59430995-224F-4A49-BE9D-2F680228FC21}" type="datetimeFigureOut">
               <a:rPr lang="en-US" smtClean="0"/>
-              <a:t>1/20/2026</a:t>
+              <a:t>1/25/2026</a:t>
             </a:fld>
             <a:endParaRPr lang="en-US"/>
           </a:p>
@@ -1433,7 +1432,7 @@
           <a:p>
             <a:fld id="{59430995-224F-4A49-BE9D-2F680228FC21}" type="datetimeFigureOut">
               <a:rPr lang="en-US" smtClean="0"/>
-              <a:t>1/20/2026</a:t>
+              <a:t>1/25/2026</a:t>
             </a:fld>
             <a:endParaRPr lang="en-US"/>
           </a:p>
@@ -1848,7 +1847,7 @@
           <a:p>
             <a:fld id="{59430995-224F-4A49-BE9D-2F680228FC21}" type="datetimeFigureOut">
               <a:rPr lang="en-US" smtClean="0"/>
-              <a:t>1/20/2026</a:t>
+              <a:t>1/25/2026</a:t>
             </a:fld>
             <a:endParaRPr lang="en-US"/>
           </a:p>
@@ -1990,7 +1989,7 @@
           <a:p>
             <a:fld id="{59430995-224F-4A49-BE9D-2F680228FC21}" type="datetimeFigureOut">
               <a:rPr lang="en-US" smtClean="0"/>
-              <a:t>1/20/2026</a:t>
+              <a:t>1/25/2026</a:t>
             </a:fld>
             <a:endParaRPr lang="en-US"/>
           </a:p>
@@ -2103,7 +2102,7 @@
           <a:p>
             <a:fld id="{59430995-224F-4A49-BE9D-2F680228FC21}" type="datetimeFigureOut">
               <a:rPr lang="en-US" smtClean="0"/>
-              <a:t>1/20/2026</a:t>
+              <a:t>1/25/2026</a:t>
             </a:fld>
             <a:endParaRPr lang="en-US"/>
           </a:p>
@@ -2416,7 +2415,7 @@
           <a:p>
             <a:fld id="{59430995-224F-4A49-BE9D-2F680228FC21}" type="datetimeFigureOut">
               <a:rPr lang="en-US" smtClean="0"/>
-              <a:t>1/20/2026</a:t>
+              <a:t>1/25/2026</a:t>
             </a:fld>
             <a:endParaRPr lang="en-US"/>
           </a:p>
@@ -2705,7 +2704,7 @@
           <a:p>
             <a:fld id="{59430995-224F-4A49-BE9D-2F680228FC21}" type="datetimeFigureOut">
               <a:rPr lang="en-US" smtClean="0"/>
-              <a:t>1/20/2026</a:t>
+              <a:t>1/25/2026</a:t>
             </a:fld>
             <a:endParaRPr lang="en-US"/>
           </a:p>
@@ -2948,7 +2947,7 @@
           <a:p>
             <a:fld id="{59430995-224F-4A49-BE9D-2F680228FC21}" type="datetimeFigureOut">
               <a:rPr lang="en-US" smtClean="0"/>
-              <a:t>1/20/2026</a:t>
+              <a:t>1/25/2026</a:t>
             </a:fld>
             <a:endParaRPr lang="en-US"/>
           </a:p>
@@ -3892,53 +3891,6 @@
       </p:sp>
       <p:pic>
         <p:nvPicPr>
-          <p:cNvPr id="1026" name="Picture 2" descr="graph TD&#10;    %% Define Styles&#10;    classDef data fill:#e1f5fe,stroke:#01579b,stroke-width:2px,color:#000;&#10;    classDef proc fill:#f3e5f5,stroke:#4a148c,stroke-width:2px,color:#000;&#10;    classDef model fill:#e0f2f1,stroke:#00695c,stroke-width:2px,color:#000;&#10;    classDef loss fill:#fce4ec,stroke:#880e4f,stroke-width:2px,color:#000;&#10;    classDef connection fill:#fff,stroke:#999,stroke-width:1px,stroke-dasharray: 5 5;&#10;&#10;    subgraph Data_Pipeline [&quot;1. Data &amp; Preprocessing Pipeline&quot;]&#10;        direction TB&#10;        RAW[(&quot;Raw Data&lt;br/&gt;(network_connections.csv)&quot;)]:::data&#10;        SPLIT[(&quot;Train/Test Split&quot;)]:::proc&#10;        &#10;        subgraph SOTA_Prep [&quot;SOTA Preprocessing&quot;]&#10;            LOG[&quot;Log Transform&lt;br/&gt;(Skewed Features)&quot;]:::proc&#10;            FEAT_ENG[&quot;Feature Engineering&lt;br/&gt;(Byte Ratio, Srv Diff)&quot;]:::proc&#10;            SCALE[&quot;StandardScaler&quot;]:::proc&#10;            ENCODE[&quot;Label/Cat Encoding&quot;]:::proc&#10;        end&#10;        &#10;        GRAM_ANALYSIS[&quot;Gram Matrix Analysis&lt;br/&gt;(Compute Feature Clusters)&quot;]:::proc&#10;        &#10;        RAW --&gt; SPLIT&#10;        SPLIT --&gt; LOG&#10;        LOG --&gt; FEAT_ENG --&gt; SCALE --&gt; ENCODE&#10;        ENCODE --&gt; GRAM_ANALYSIS&#10;    end&#10;&#10;    subgraph Meta_Features [&quot;2. Meta-Generation&quot;]&#10;        NCA[&quot;Neighborhood Components Analysis&lt;br/&gt;(NCA)&quot;]:::proc&#10;        ISO[&quot;Isolation Forest&lt;br/&gt;(Anomaly Score)&quot;]:::proc&#10;        META_TENSOR[(&quot;Meta Targets Tensor&quot;)]:::data&#10;        &#10;        ENCODE --&gt; NCA &amp; ISO&#10;        NCA &amp; ISO --&gt; META_TENSOR&#10;    end&#10;&#10;    subgraph Phase1 [&quot;3. Phase 1: Pre-Training (TabularViT)&quot;]&#10;        direction TB&#10;        COLLATOR[&quot;GramMaskingCollator&lt;br/&gt;(Uses Gram Clusters + Noise)&quot;]:::proc&#10;        &#10;        subgraph Student_Teacher [&quot;Student-Teacher Framework&quot;]&#10;            STUDENT[[&quot;Student Encoder&lt;br/&gt;(TabularViT_SOTA)&quot;]]:::model&#10;            TEACHER[[&quot;Teacher Encoder&lt;br/&gt;(EMA Update)&quot;]]:::model&#10;            &#10;            HEADS_S[&quot;Heads:&lt;br/&gt;DINO + MIM&quot;]:::model&#10;            HEADS_T[&quot;Heads:&lt;br/&gt;DINO&quot;]:::model&#10;        end&#10;        &#10;        subgraph Losses_P1 [&quot;Gram Anchoring Losses&quot;]&#10;            L_DINO{{&quot;1. DINO Loss&lt;br/&gt;(Global / Sinkhorn)&quot;}}:::loss&#10;            L_MIM{{&quot;2. MIM Loss&lt;br/&gt;(Reconstruction)&quot;}}:::loss&#10;            L_KOLEO{{&quot;3. KoLeo Loss&lt;br/&gt;(Feature Diversity)&quot;}}:::loss&#10;            L_GRAM{{&quot;4. Gram Matrix Loss&lt;br/&gt;(Structure/Correlation)&quot;}}:::loss&#10;        end&#10;        &#10;        ENCODE --&gt; COLLATOR&#10;        GRAM_ANALYSIS --&gt; COLLATOR&#10;        META_TENSOR --&gt; COLLATOR&#10;        &#10;        COLLATOR --&gt; STUDENT&#10;        COLLATOR --&gt; TEACHER&#10;        &#10;        STUDENT --&gt; HEADS_S&#10;        TEACHER --&gt; HEADS_T&#10;        &#10;        HEADS_S --&gt; L_DINO &amp; L_MIM &amp; L_KOLEO &amp; L_GRAM&#10;        HEADS_T --&gt; L_DINO &amp; L_GRAM&#10;    end&#10;&#10;    subgraph Phase3 [&quot;4. Phase 3: Fine-Tuning (Deep SwiGLU)&quot;]&#10;        direction TB&#10;        ENC_FROZEN[&quot;Encoder Features&lt;br/&gt;(Partial Unfreeze Last Layer)&quot;]:::model&#10;        &#10;        subgraph SwiGLU_Net [&quot;Deep SwiGLU Classifier&quot;]&#10;            INPUT_PROJ[&quot;Input Projection&quot;]:::model&#10;            BLOCKS[&quot;SwiGLU Blocks&lt;br/&gt;(Swish-Gate * Value)&quot;]:::model&#10;            RMS[&quot;RMSNorm&quot;]:::model&#10;            LINEAR[&quot;Linear Head&quot;]:::model&#10;        end&#10;        &#10;        FOCAL{{&quot;Weighted Focal Loss&lt;br/&gt;(Imbalance Optimized)&quot;}}:::loss&#10;        &#10;        STUDENT -.-&gt; ENC_FROZEN&#10;        ENC_FROZEN --&gt; INPUT_PROJ --&gt; BLOCKS --&gt; RMS --&gt; LINEAR&#10;        LINEAR --&gt; FOCAL&#10;    end&#10;&#10;    subgraph Evaluation [&quot;5. Evaluation&quot;]&#10;        TEST_SET[(&quot;Test Set&quot;)]:::data&#10;        PROBE[&quot;SwiGLU Probe (Inference)&quot;]:::model&#10;        METRICS[&quot;Classification Report&lt;br/&gt;Confusion Matrix&quot;]:::proc&#10;        &#10;        TEST_SET --&gt; PROBE&#10;        LINEAR -.-&gt; PROBE&#10;        PROBE --&gt; METRICS&#10;    end&#10;&#10;    %% Edge Labels&#10;    L_GRAM ---|&quot;Matches Correlation Matrix&quot;| HEADS_T">
-            <a:extLst>
-              <a:ext uri="{FF2B5EF4-FFF2-40B4-BE49-F238E27FC236}">
-                <a16:creationId xmlns:a16="http://schemas.microsoft.com/office/drawing/2014/main" id="{0B8F3989-A378-9502-F3C7-2A0BD9173C31}"/>
-              </a:ext>
-            </a:extLst>
-          </p:cNvPr>
-          <p:cNvPicPr>
-            <a:picLocks noChangeAspect="1" noChangeArrowheads="1"/>
-          </p:cNvPicPr>
-          <p:nvPr/>
-        </p:nvPicPr>
-        <p:blipFill rotWithShape="1">
-          <a:blip r:embed="rId3">
-            <a:extLst>
-              <a:ext uri="{28A0092B-C50C-407E-A947-70E740481C1C}">
-                <a14:useLocalDpi xmlns:a14="http://schemas.microsoft.com/office/drawing/2010/main" val="0"/>
-              </a:ext>
-            </a:extLst>
-          </a:blip>
-          <a:srcRect l="73660" t="33156" b="55067"/>
-          <a:stretch>
-            <a:fillRect/>
-          </a:stretch>
-        </p:blipFill>
-        <p:spPr bwMode="auto">
-          <a:xfrm>
-            <a:off x="7367016" y="4354489"/>
-            <a:ext cx="3341188" cy="1726991"/>
-          </a:xfrm>
-          <a:prstGeom prst="rect">
-            <a:avLst/>
-          </a:prstGeom>
-          <a:noFill/>
-          <a:extLst>
-            <a:ext uri="{909E8E84-426E-40DD-AFC4-6F175D3DCCD1}">
-              <a14:hiddenFill xmlns:a14="http://schemas.microsoft.com/office/drawing/2010/main">
-                <a:solidFill>
-                  <a:srgbClr val="FFFFFF"/>
-                </a:solidFill>
-              </a14:hiddenFill>
-            </a:ext>
-          </a:extLst>
-        </p:spPr>
-      </p:pic>
-      <p:pic>
-        <p:nvPicPr>
           <p:cNvPr id="3" name="Picture 2" descr="graph TD&#10;    %% Define Styles&#10;    classDef data fill:#e1f5fe,stroke:#01579b,stroke-width:2px,color:#000;&#10;    classDef proc fill:#f3e5f5,stroke:#4a148c,stroke-width:2px,color:#000;&#10;    classDef model fill:#e0f2f1,stroke:#00695c,stroke-width:2px,color:#000;&#10;    classDef loss fill:#fce4ec,stroke:#880e4f,stroke-width:2px,color:#000;&#10;    classDef connection fill:#fff,stroke:#999,stroke-width:1px,stroke-dasharray: 5 5;&#10;&#10;    subgraph Data_Pipeline [&quot;1. Data &amp; Preprocessing Pipeline&quot;]&#10;        direction TB&#10;        RAW[(&quot;Raw Data&lt;br/&gt;(network_connections.csv)&quot;)]:::data&#10;        SPLIT[(&quot;Train/Test Split&quot;)]:::proc&#10;        &#10;        subgraph SOTA_Prep [&quot;SOTA Preprocessing&quot;]&#10;            LOG[&quot;Log Transform&lt;br/&gt;(Skewed Features)&quot;]:::proc&#10;            FEAT_ENG[&quot;Feature Engineering&lt;br/&gt;(Byte Ratio, Srv Diff)&quot;]:::proc&#10;            SCALE[&quot;StandardScaler&quot;]:::proc&#10;            ENCODE[&quot;Label/Cat Encoding&quot;]:::proc&#10;        end&#10;        &#10;        GRAM_ANALYSIS[&quot;Gram Matrix Analysis&lt;br/&gt;(Compute Feature Clusters)&quot;]:::proc&#10;        &#10;        RAW --&gt; SPLIT&#10;        SPLIT --&gt; LOG&#10;        LOG --&gt; FEAT_ENG --&gt; SCALE --&gt; ENCODE&#10;        ENCODE --&gt; GRAM_ANALYSIS&#10;    end&#10;&#10;    subgraph Meta_Features [&quot;2. Meta-Generation&quot;]&#10;        NCA[&quot;Neighborhood Components Analysis&lt;br/&gt;(NCA)&quot;]:::proc&#10;        ISO[&quot;Isolation Forest&lt;br/&gt;(Anomaly Score)&quot;]:::proc&#10;        META_TENSOR[(&quot;Meta Targets Tensor&quot;)]:::data&#10;        &#10;        ENCODE --&gt; NCA &amp; ISO&#10;        NCA &amp; ISO --&gt; META_TENSOR&#10;    end&#10;&#10;    subgraph Phase1 [&quot;3. Phase 1: Pre-Training (TabularViT)&quot;]&#10;        direction TB&#10;        COLLATOR[&quot;GramMaskingCollator&lt;br/&gt;(Uses Gram Clusters + Noise)&quot;]:::proc&#10;        &#10;        subgraph Student_Teacher [&quot;Student-Teacher Framework&quot;]&#10;            STUDENT[[&quot;Student Encoder&lt;br/&gt;(TabularViT_SOTA)&quot;]]:::model&#10;            TEACHER[[&quot;Teacher Encoder&lt;br/&gt;(EMA Update)&quot;]]:::model&#10;            &#10;            HEADS_S[&quot;Heads:&lt;br/&gt;DINO + MIM&quot;]:::model&#10;            HEADS_T[&quot;Heads:&lt;br/&gt;DINO&quot;]:::model&#10;        end&#10;        &#10;        subgraph Losses_P1 [&quot;Gram Anchoring Losses&quot;]&#10;            L_DINO{{&quot;1. DINO Loss&lt;br/&gt;(Global / Sinkhorn)&quot;}}:::loss&#10;            L_MIM{{&quot;2. MIM Loss&lt;br/&gt;(Reconstruction)&quot;}}:::loss&#10;            L_KOLEO{{&quot;3. KoLeo Loss&lt;br/&gt;(Feature Diversity)&quot;}}:::loss&#10;            L_GRAM{{&quot;4. Gram Matrix Loss&lt;br/&gt;(Structure/Correlation)&quot;}}:::loss&#10;        end&#10;        &#10;        ENCODE --&gt; COLLATOR&#10;        GRAM_ANALYSIS --&gt; COLLATOR&#10;        META_TENSOR --&gt; COLLATOR&#10;        &#10;        COLLATOR --&gt; STUDENT&#10;        COLLATOR --&gt; TEACHER&#10;        &#10;        STUDENT --&gt; HEADS_S&#10;        TEACHER --&gt; HEADS_T&#10;        &#10;        HEADS_S --&gt; L_DINO &amp; L_MIM &amp; L_KOLEO &amp; L_GRAM&#10;        HEADS_T --&gt; L_DINO &amp; L_GRAM&#10;    end&#10;&#10;    subgraph Phase3 [&quot;4. Phase 3: Fine-Tuning (Deep SwiGLU)&quot;]&#10;        direction TB&#10;        ENC_FROZEN[&quot;Encoder Features&lt;br/&gt;(Partial Unfreeze Last Layer)&quot;]:::model&#10;        &#10;        subgraph SwiGLU_Net [&quot;Deep SwiGLU Classifier&quot;]&#10;            INPUT_PROJ[&quot;Input Projection&quot;]:::model&#10;            BLOCKS[&quot;SwiGLU Blocks&lt;br/&gt;(Swish-Gate * Value)&quot;]:::model&#10;            RMS[&quot;RMSNorm&quot;]:::model&#10;            LINEAR[&quot;Linear Head&quot;]:::model&#10;        end&#10;        &#10;        FOCAL{{&quot;Weighted Focal Loss&lt;br/&gt;(Imbalance Optimized)&quot;}}:::loss&#10;        &#10;        STUDENT -.-&gt; ENC_FROZEN&#10;        ENC_FROZEN --&gt; INPUT_PROJ --&gt; BLOCKS --&gt; RMS --&gt; LINEAR&#10;        LINEAR --&gt; FOCAL&#10;    end&#10;&#10;    subgraph Evaluation [&quot;5. Evaluation&quot;]&#10;        TEST_SET[(&quot;Test Set&quot;)]:::data&#10;        PROBE[&quot;SwiGLU Probe (Inference)&quot;]:::model&#10;        METRICS[&quot;Classification Report&lt;br/&gt;Confusion Matrix&quot;]:::proc&#10;        &#10;        TEST_SET --&gt; PROBE&#10;        LINEAR -.-&gt; PROBE&#10;        PROBE --&gt; METRICS&#10;    end&#10;&#10;    %% Edge Labels&#10;    L_GRAM ---|&quot;Matches Correlation Matrix&quot;| HEADS_T">
             <a:extLst>
               <a:ext uri="{FF2B5EF4-FFF2-40B4-BE49-F238E27FC236}">
@@ -4377,441 +4329,6 @@
         <p:cNvPr id="1" name="">
           <a:extLst>
             <a:ext uri="{FF2B5EF4-FFF2-40B4-BE49-F238E27FC236}">
-              <a16:creationId xmlns:a16="http://schemas.microsoft.com/office/drawing/2014/main" id="{5538A438-B5A8-E614-AD79-4A8C1D605950}"/>
-            </a:ext>
-          </a:extLst>
-        </p:cNvPr>
-        <p:cNvGrpSpPr/>
-        <p:nvPr/>
-      </p:nvGrpSpPr>
-      <p:grpSpPr>
-        <a:xfrm>
-          <a:off x="0" y="0"/>
-          <a:ext cx="0" cy="0"/>
-          <a:chOff x="0" y="0"/>
-          <a:chExt cx="0" cy="0"/>
-        </a:xfrm>
-      </p:grpSpPr>
-      <p:cxnSp>
-        <p:nvCxnSpPr>
-          <p:cNvPr id="5" name="Gerader Verbinder 4">
-            <a:extLst>
-              <a:ext uri="{FF2B5EF4-FFF2-40B4-BE49-F238E27FC236}">
-                <a16:creationId xmlns:a16="http://schemas.microsoft.com/office/drawing/2014/main" id="{154AAAEF-E311-67A5-B762-180C5EFED2B3}"/>
-              </a:ext>
-            </a:extLst>
-          </p:cNvPr>
-          <p:cNvCxnSpPr>
-            <a:cxnSpLocks/>
-          </p:cNvCxnSpPr>
-          <p:nvPr/>
-        </p:nvCxnSpPr>
-        <p:spPr>
-          <a:xfrm>
-            <a:off x="0" y="477078"/>
-            <a:ext cx="12192000" cy="0"/>
-          </a:xfrm>
-          <a:prstGeom prst="line">
-            <a:avLst/>
-          </a:prstGeom>
-          <a:ln w="19050">
-            <a:solidFill>
-              <a:srgbClr val="FF6900"/>
-            </a:solidFill>
-            <a:prstDash val="sysDot"/>
-          </a:ln>
-        </p:spPr>
-        <p:style>
-          <a:lnRef idx="1">
-            <a:schemeClr val="accent1"/>
-          </a:lnRef>
-          <a:fillRef idx="0">
-            <a:schemeClr val="accent1"/>
-          </a:fillRef>
-          <a:effectRef idx="0">
-            <a:schemeClr val="accent1"/>
-          </a:effectRef>
-          <a:fontRef idx="minor">
-            <a:schemeClr val="tx1"/>
-          </a:fontRef>
-        </p:style>
-      </p:cxnSp>
-      <p:pic>
-        <p:nvPicPr>
-          <p:cNvPr id="9" name="Grafik 8" descr="Ein Bild, das Logo enthält.&#10;&#10;Automatisch generierte Beschreibung">
-            <a:extLst>
-              <a:ext uri="{FF2B5EF4-FFF2-40B4-BE49-F238E27FC236}">
-                <a16:creationId xmlns:a16="http://schemas.microsoft.com/office/drawing/2014/main" id="{E6181941-2CE4-849D-4FE8-3D4117F8E7BA}"/>
-              </a:ext>
-            </a:extLst>
-          </p:cNvPr>
-          <p:cNvPicPr>
-            <a:picLocks noChangeAspect="1"/>
-          </p:cNvPicPr>
-          <p:nvPr/>
-        </p:nvPicPr>
-        <p:blipFill>
-          <a:blip r:embed="rId2">
-            <a:extLst>
-              <a:ext uri="{28A0092B-C50C-407E-A947-70E740481C1C}">
-                <a14:useLocalDpi xmlns:a14="http://schemas.microsoft.com/office/drawing/2010/main" val="0"/>
-              </a:ext>
-            </a:extLst>
-          </a:blip>
-          <a:stretch>
-            <a:fillRect/>
-          </a:stretch>
-        </p:blipFill>
-        <p:spPr>
-          <a:xfrm>
-            <a:off x="915766" y="6220124"/>
-            <a:ext cx="2825502" cy="509017"/>
-          </a:xfrm>
-          <a:prstGeom prst="rect">
-            <a:avLst/>
-          </a:prstGeom>
-        </p:spPr>
-      </p:pic>
-      <p:sp>
-        <p:nvSpPr>
-          <p:cNvPr id="25" name="Textfeld 24">
-            <a:extLst>
-              <a:ext uri="{FF2B5EF4-FFF2-40B4-BE49-F238E27FC236}">
-                <a16:creationId xmlns:a16="http://schemas.microsoft.com/office/drawing/2014/main" id="{DFF6D646-8DE1-67A1-E54A-31275822A44A}"/>
-              </a:ext>
-            </a:extLst>
-          </p:cNvPr>
-          <p:cNvSpPr txBox="1"/>
-          <p:nvPr/>
-        </p:nvSpPr>
-        <p:spPr>
-          <a:xfrm>
-            <a:off x="915764" y="100051"/>
-            <a:ext cx="10438035" cy="754053"/>
-          </a:xfrm>
-          <a:prstGeom prst="rect">
-            <a:avLst/>
-          </a:prstGeom>
-          <a:solidFill>
-            <a:schemeClr val="bg1"/>
-          </a:solidFill>
-        </p:spPr>
-        <p:txBody>
-          <a:bodyPr wrap="square" lIns="91440" tIns="45720" rIns="91440" bIns="45720" rtlCol="0" anchor="t">
-            <a:spAutoFit/>
-          </a:bodyPr>
-          <a:lstStyle/>
-          <a:p>
-            <a:r>
-              <a:rPr lang="de-DE" sz="4300" b="1" dirty="0">
-                <a:solidFill>
-                  <a:srgbClr val="FF6A00"/>
-                </a:solidFill>
-                <a:latin typeface="Inter" panose="02000503000000020004" pitchFamily="2" charset="0"/>
-              </a:rPr>
-              <a:t>Evaluation &amp; Perfomance Quality</a:t>
-            </a:r>
-            <a:endParaRPr lang="en-US" sz="4300" b="1" dirty="0">
-              <a:solidFill>
-                <a:srgbClr val="FF6A00"/>
-              </a:solidFill>
-              <a:latin typeface="Inter" panose="02000503000000020004" pitchFamily="2" charset="0"/>
-            </a:endParaRPr>
-          </a:p>
-        </p:txBody>
-      </p:sp>
-      <p:sp>
-        <p:nvSpPr>
-          <p:cNvPr id="28" name="Textfeld 27">
-            <a:extLst>
-              <a:ext uri="{FF2B5EF4-FFF2-40B4-BE49-F238E27FC236}">
-                <a16:creationId xmlns:a16="http://schemas.microsoft.com/office/drawing/2014/main" id="{47BC1FC6-2CD9-5EDC-8BF7-8439569C334E}"/>
-              </a:ext>
-            </a:extLst>
-          </p:cNvPr>
-          <p:cNvSpPr txBox="1"/>
-          <p:nvPr/>
-        </p:nvSpPr>
-        <p:spPr>
-          <a:xfrm>
-            <a:off x="915766" y="1547274"/>
-            <a:ext cx="9872208" cy="4154984"/>
-          </a:xfrm>
-          <a:prstGeom prst="rect">
-            <a:avLst/>
-          </a:prstGeom>
-          <a:noFill/>
-        </p:spPr>
-        <p:txBody>
-          <a:bodyPr wrap="square" rtlCol="0">
-            <a:spAutoFit/>
-          </a:bodyPr>
-          <a:lstStyle/>
-          <a:p>
-            <a:pPr marL="342900" lvl="0" indent="-342900" eaLnBrk="0" fontAlgn="base" hangingPunct="0">
-              <a:spcBef>
-                <a:spcPct val="0"/>
-              </a:spcBef>
-              <a:spcAft>
-                <a:spcPct val="0"/>
-              </a:spcAft>
-              <a:buFont typeface="Arial" panose="020B0604020202020204" pitchFamily="34" charset="0"/>
-              <a:buChar char="•"/>
-            </a:pPr>
-            <a:r>
-              <a:rPr lang="en-US" altLang="en-US" sz="2400" b="1" dirty="0">
-                <a:latin typeface="Arial" panose="020B0604020202020204" pitchFamily="34" charset="0"/>
-              </a:rPr>
-              <a:t>Performance Metrics: </a:t>
-            </a:r>
-            <a:r>
-              <a:rPr lang="en-US" altLang="en-US" sz="2400" dirty="0">
-                <a:latin typeface="Arial" panose="020B0604020202020204" pitchFamily="34" charset="0"/>
-              </a:rPr>
-              <a:t>Focus on Weighted F1-Score and Class-Specific Recall</a:t>
-            </a:r>
-          </a:p>
-          <a:p>
-            <a:pPr marL="342900" lvl="0" indent="-342900" eaLnBrk="0" fontAlgn="base" hangingPunct="0">
-              <a:spcBef>
-                <a:spcPct val="0"/>
-              </a:spcBef>
-              <a:spcAft>
-                <a:spcPct val="0"/>
-              </a:spcAft>
-              <a:buFont typeface="Arial" panose="020B0604020202020204" pitchFamily="34" charset="0"/>
-              <a:buChar char="•"/>
-            </a:pPr>
-            <a:r>
-              <a:rPr lang="en-US" altLang="en-US" sz="2400" b="1" dirty="0">
-                <a:latin typeface="Arial" panose="020B0604020202020204" pitchFamily="34" charset="0"/>
-              </a:rPr>
-              <a:t>U2R Detection Rate:</a:t>
-            </a:r>
-          </a:p>
-          <a:p>
-            <a:pPr marL="800100" lvl="1" indent="-342900" eaLnBrk="0" fontAlgn="base" hangingPunct="0">
-              <a:spcBef>
-                <a:spcPct val="0"/>
-              </a:spcBef>
-              <a:spcAft>
-                <a:spcPct val="0"/>
-              </a:spcAft>
-              <a:buFont typeface="Arial" panose="020B0604020202020204" pitchFamily="34" charset="0"/>
-              <a:buChar char="•"/>
-            </a:pPr>
-            <a:r>
-              <a:rPr lang="en-US" altLang="en-US" sz="2400" dirty="0">
-                <a:latin typeface="Arial" panose="020B0604020202020204" pitchFamily="34" charset="0"/>
-              </a:rPr>
-              <a:t>Baseline: 0%</a:t>
-            </a:r>
-          </a:p>
-          <a:p>
-            <a:pPr marL="800100" lvl="1" indent="-342900" eaLnBrk="0" fontAlgn="base" hangingPunct="0">
-              <a:spcBef>
-                <a:spcPct val="0"/>
-              </a:spcBef>
-              <a:spcAft>
-                <a:spcPct val="0"/>
-              </a:spcAft>
-              <a:buFont typeface="Arial" panose="020B0604020202020204" pitchFamily="34" charset="0"/>
-              <a:buChar char="•"/>
-            </a:pPr>
-            <a:r>
-              <a:rPr lang="en-US" altLang="en-US" sz="2400" dirty="0">
-                <a:latin typeface="Arial" panose="020B0604020202020204" pitchFamily="34" charset="0"/>
-              </a:rPr>
-              <a:t>Transformer Model: ~41% - 67%</a:t>
-            </a:r>
-          </a:p>
-          <a:p>
-            <a:pPr marL="342900" indent="-342900" eaLnBrk="0" fontAlgn="base" hangingPunct="0">
-              <a:spcBef>
-                <a:spcPct val="0"/>
-              </a:spcBef>
-              <a:spcAft>
-                <a:spcPct val="0"/>
-              </a:spcAft>
-              <a:buFont typeface="Arial" panose="020B0604020202020204" pitchFamily="34" charset="0"/>
-              <a:buChar char="•"/>
-            </a:pPr>
-            <a:r>
-              <a:rPr lang="en-US" altLang="en-US" sz="2400" b="1" dirty="0">
-                <a:latin typeface="Arial" panose="020B0604020202020204" pitchFamily="34" charset="0"/>
-              </a:rPr>
-              <a:t>Advantage</a:t>
-            </a:r>
-            <a:r>
-              <a:rPr lang="en-US" altLang="en-US" sz="2400" dirty="0">
-                <a:latin typeface="Arial" panose="020B0604020202020204" pitchFamily="34" charset="0"/>
-              </a:rPr>
-              <a:t>: Massive increase in Minority Class Recall</a:t>
-            </a:r>
-          </a:p>
-          <a:p>
-            <a:pPr marL="342900" indent="-342900" eaLnBrk="0" fontAlgn="base" hangingPunct="0">
-              <a:spcBef>
-                <a:spcPct val="0"/>
-              </a:spcBef>
-              <a:spcAft>
-                <a:spcPct val="0"/>
-              </a:spcAft>
-              <a:buFont typeface="Arial" panose="020B0604020202020204" pitchFamily="34" charset="0"/>
-              <a:buChar char="•"/>
-            </a:pPr>
-            <a:r>
-              <a:rPr lang="en-US" altLang="en-US" sz="2400" b="1" dirty="0">
-                <a:latin typeface="Arial" panose="020B0604020202020204" pitchFamily="34" charset="0"/>
-              </a:rPr>
-              <a:t>Operational Outcome: </a:t>
-            </a:r>
-            <a:r>
-              <a:rPr lang="en-US" altLang="en-US" sz="2400" dirty="0">
-                <a:latin typeface="Arial" panose="020B0604020202020204" pitchFamily="34" charset="0"/>
-              </a:rPr>
-              <a:t>The system successfully identifies previously invisible threats</a:t>
-            </a:r>
-            <a:endParaRPr lang="en-US" altLang="en-US" sz="2400" b="1" dirty="0">
-              <a:latin typeface="Arial" panose="020B0604020202020204" pitchFamily="34" charset="0"/>
-            </a:endParaRPr>
-          </a:p>
-          <a:p>
-            <a:pPr marL="342900" lvl="0" indent="-342900" eaLnBrk="0" fontAlgn="base" hangingPunct="0">
-              <a:spcBef>
-                <a:spcPct val="0"/>
-              </a:spcBef>
-              <a:spcAft>
-                <a:spcPct val="0"/>
-              </a:spcAft>
-              <a:buFont typeface="Arial" panose="020B0604020202020204" pitchFamily="34" charset="0"/>
-              <a:buChar char="•"/>
-            </a:pPr>
-            <a:endParaRPr lang="en-US" altLang="en-US" sz="2400" b="1" dirty="0">
-              <a:latin typeface="Arial" panose="020B0604020202020204" pitchFamily="34" charset="0"/>
-            </a:endParaRPr>
-          </a:p>
-          <a:p>
-            <a:pPr lvl="0" eaLnBrk="0" fontAlgn="base" hangingPunct="0">
-              <a:spcBef>
-                <a:spcPct val="0"/>
-              </a:spcBef>
-              <a:spcAft>
-                <a:spcPct val="0"/>
-              </a:spcAft>
-            </a:pPr>
-            <a:endParaRPr kumimoji="0" lang="en-US" altLang="en-US" sz="2400" b="1" i="0" u="none" strike="noStrike" cap="none" normalizeH="0" baseline="0" dirty="0">
-              <a:ln>
-                <a:noFill/>
-              </a:ln>
-              <a:solidFill>
-                <a:schemeClr val="tx1"/>
-              </a:solidFill>
-              <a:effectLst/>
-              <a:latin typeface="Arial" panose="020B0604020202020204" pitchFamily="34" charset="0"/>
-            </a:endParaRPr>
-          </a:p>
-          <a:p>
-            <a:endParaRPr lang="en-US" sz="2400" dirty="0">
-              <a:latin typeface="Inter Light" panose="02000503000000020004"/>
-            </a:endParaRPr>
-          </a:p>
-        </p:txBody>
-      </p:sp>
-      <p:cxnSp>
-        <p:nvCxnSpPr>
-          <p:cNvPr id="8" name="Gerader Verbinder 7">
-            <a:extLst>
-              <a:ext uri="{FF2B5EF4-FFF2-40B4-BE49-F238E27FC236}">
-                <a16:creationId xmlns:a16="http://schemas.microsoft.com/office/drawing/2014/main" id="{EAE285F1-4288-A483-B6E2-877F72D47614}"/>
-              </a:ext>
-            </a:extLst>
-          </p:cNvPr>
-          <p:cNvCxnSpPr>
-            <a:cxnSpLocks/>
-          </p:cNvCxnSpPr>
-          <p:nvPr/>
-        </p:nvCxnSpPr>
-        <p:spPr>
-          <a:xfrm>
-            <a:off x="0" y="6142383"/>
-            <a:ext cx="12192000" cy="0"/>
-          </a:xfrm>
-          <a:prstGeom prst="line">
-            <a:avLst/>
-          </a:prstGeom>
-          <a:ln w="19050">
-            <a:solidFill>
-              <a:srgbClr val="FF6900"/>
-            </a:solidFill>
-            <a:prstDash val="sysDot"/>
-          </a:ln>
-        </p:spPr>
-        <p:style>
-          <a:lnRef idx="1">
-            <a:schemeClr val="accent1"/>
-          </a:lnRef>
-          <a:fillRef idx="0">
-            <a:schemeClr val="accent1"/>
-          </a:fillRef>
-          <a:effectRef idx="0">
-            <a:schemeClr val="accent1"/>
-          </a:effectRef>
-          <a:fontRef idx="minor">
-            <a:schemeClr val="tx1"/>
-          </a:fontRef>
-        </p:style>
-      </p:cxnSp>
-      <p:sp>
-        <p:nvSpPr>
-          <p:cNvPr id="2" name="Slide Number Placeholder 1">
-            <a:extLst>
-              <a:ext uri="{FF2B5EF4-FFF2-40B4-BE49-F238E27FC236}">
-                <a16:creationId xmlns:a16="http://schemas.microsoft.com/office/drawing/2014/main" id="{A44CE9C7-A02F-A4CC-31D1-083F6A0C2DB9}"/>
-              </a:ext>
-            </a:extLst>
-          </p:cNvPr>
-          <p:cNvSpPr>
-            <a:spLocks noGrp="1"/>
-          </p:cNvSpPr>
-          <p:nvPr>
-            <p:ph type="sldNum" sz="quarter" idx="12"/>
-          </p:nvPr>
-        </p:nvSpPr>
-        <p:spPr/>
-        <p:txBody>
-          <a:bodyPr/>
-          <a:lstStyle/>
-          <a:p>
-            <a:fld id="{0CE7A728-0978-4F84-B02A-B67BD1D5B964}" type="slidenum">
-              <a:rPr lang="en-GB" smtClean="0"/>
-              <a:t>12</a:t>
-            </a:fld>
-            <a:endParaRPr lang="en-GB"/>
-          </a:p>
-        </p:txBody>
-      </p:sp>
-    </p:spTree>
-    <p:extLst>
-      <p:ext uri="{BB962C8B-B14F-4D97-AF65-F5344CB8AC3E}">
-        <p14:creationId xmlns:p14="http://schemas.microsoft.com/office/powerpoint/2010/main" val="4161386513"/>
-      </p:ext>
-    </p:extLst>
-  </p:cSld>
-  <p:clrMapOvr>
-    <a:masterClrMapping/>
-  </p:clrMapOvr>
-</p:sld>
-</file>
-
-<file path=ppt/slides/slide13.xml><?xml version="1.0" encoding="utf-8"?>
-<p:sld xmlns:a="http://schemas.openxmlformats.org/drawingml/2006/main" xmlns:r="http://schemas.openxmlformats.org/officeDocument/2006/relationships" xmlns:p="http://schemas.openxmlformats.org/presentationml/2006/main">
-  <p:cSld>
-    <p:spTree>
-      <p:nvGrpSpPr>
-        <p:cNvPr id="1" name="">
-          <a:extLst>
-            <a:ext uri="{FF2B5EF4-FFF2-40B4-BE49-F238E27FC236}">
               <a16:creationId xmlns:a16="http://schemas.microsoft.com/office/drawing/2014/main" id="{173446E8-5FBA-0CE2-60FF-95BCE49042BD}"/>
             </a:ext>
           </a:extLst>
@@ -4944,14 +4461,26 @@
                 </a:solidFill>
                 <a:latin typeface="Inter" panose="02000503000000020004" pitchFamily="2" charset="0"/>
               </a:rPr>
-              <a:t>Evaluation &amp; Perfomance Quality</a:t>
-            </a:r>
-            <a:endParaRPr lang="en-US" sz="4300" b="1" dirty="0">
-              <a:solidFill>
-                <a:srgbClr val="FF6A00"/>
-              </a:solidFill>
-              <a:latin typeface="Inter" panose="02000503000000020004" pitchFamily="2" charset="0"/>
-            </a:endParaRPr>
+              <a:t>Binary Classification </a:t>
+            </a:r>
+            <a:r>
+              <a:rPr lang="de-DE" sz="4300" b="1" dirty="0" err="1">
+                <a:solidFill>
+                  <a:srgbClr val="FF6A00"/>
+                </a:solidFill>
+                <a:latin typeface="Inter" panose="02000503000000020004" pitchFamily="2" charset="0"/>
+              </a:rPr>
+              <a:t>Metrics</a:t>
+            </a:r>
+            <a:r>
+              <a:rPr lang="de-DE" sz="4300" b="1" dirty="0">
+                <a:solidFill>
+                  <a:srgbClr val="FF6A00"/>
+                </a:solidFill>
+                <a:latin typeface="Inter" panose="02000503000000020004" pitchFamily="2" charset="0"/>
+              </a:rPr>
+              <a:t> </a:t>
+            </a:r>
           </a:p>
         </p:txBody>
       </p:sp>
@@ -4970,7 +4499,7 @@
         <p:spPr>
           <a:xfrm>
             <a:off x="915766" y="1547274"/>
-            <a:ext cx="9872208" cy="830997"/>
+            <a:ext cx="9872208" cy="461665"/>
           </a:xfrm>
           <a:prstGeom prst="rect">
             <a:avLst/>
@@ -4982,14 +4511,6 @@
             <a:spAutoFit/>
           </a:bodyPr>
           <a:lstStyle/>
-          <a:p>
-            <a:r>
-              <a:rPr lang="en-US" sz="2400" dirty="0">
-                <a:latin typeface="Inter Light" panose="02000503000000020004"/>
-              </a:rPr>
-              <a:t>Binary Classification Metrics </a:t>
-            </a:r>
-          </a:p>
           <a:p>
             <a:r>
               <a:rPr lang="en-US" sz="2400" dirty="0">
@@ -5067,7 +4588,7 @@
           <a:p>
             <a:fld id="{0CE7A728-0978-4F84-B02A-B67BD1D5B964}" type="slidenum">
               <a:rPr lang="en-GB" smtClean="0"/>
-              <a:t>13</a:t>
+              <a:t>12</a:t>
             </a:fld>
             <a:endParaRPr lang="en-GB"/>
           </a:p>
@@ -5095,8 +4616,8 @@
         </p:blipFill>
         <p:spPr>
           <a:xfrm>
-            <a:off x="1075750" y="2692415"/>
-            <a:ext cx="4480948" cy="2156647"/>
+            <a:off x="161350" y="2555255"/>
+            <a:ext cx="5567684" cy="2679685"/>
           </a:xfrm>
           <a:prstGeom prst="rect">
             <a:avLst/>
@@ -5125,8 +4646,8 @@
         </p:blipFill>
         <p:spPr>
           <a:xfrm>
-            <a:off x="6405186" y="2749569"/>
-            <a:ext cx="4402662" cy="2099490"/>
+            <a:off x="6096000" y="2535796"/>
+            <a:ext cx="5654040" cy="2696232"/>
           </a:xfrm>
           <a:prstGeom prst="rect">
             <a:avLst/>
@@ -5146,7 +4667,7 @@
 </p:sld>
 </file>
 
-<file path=ppt/slides/slide14.xml><?xml version="1.0" encoding="utf-8"?>
+<file path=ppt/slides/slide13.xml><?xml version="1.0" encoding="utf-8"?>
 <p:sld xmlns:a="http://schemas.openxmlformats.org/drawingml/2006/main" xmlns:r="http://schemas.openxmlformats.org/officeDocument/2006/relationships" xmlns:p="http://schemas.openxmlformats.org/presentationml/2006/main">
   <p:cSld>
     <p:spTree>
@@ -5469,7 +4990,7 @@
           <a:p>
             <a:fld id="{0CE7A728-0978-4F84-B02A-B67BD1D5B964}" type="slidenum">
               <a:rPr lang="en-GB" smtClean="0"/>
-              <a:t>14</a:t>
+              <a:t>13</a:t>
             </a:fld>
             <a:endParaRPr lang="en-GB"/>
           </a:p>
@@ -5518,7 +5039,7 @@
 </p:sld>
 </file>
 
-<file path=ppt/slides/slide15.xml><?xml version="1.0" encoding="utf-8"?>
+<file path=ppt/slides/slide14.xml><?xml version="1.0" encoding="utf-8"?>
 <p:sld xmlns:a="http://schemas.openxmlformats.org/drawingml/2006/main" xmlns:r="http://schemas.openxmlformats.org/officeDocument/2006/relationships" xmlns:p="http://schemas.openxmlformats.org/presentationml/2006/main">
   <p:cSld>
     <p:spTree>
@@ -5736,7 +5257,7 @@
           <a:p>
             <a:fld id="{0CE7A728-0978-4F84-B02A-B67BD1D5B964}" type="slidenum">
               <a:rPr lang="en-GB" smtClean="0"/>
-              <a:t>15</a:t>
+              <a:t>14</a:t>
             </a:fld>
             <a:endParaRPr lang="en-GB"/>
           </a:p>
@@ -5785,7 +5306,7 @@
 </p:sld>
 </file>
 
-<file path=ppt/slides/slide16.xml><?xml version="1.0" encoding="utf-8"?>
+<file path=ppt/slides/slide15.xml><?xml version="1.0" encoding="utf-8"?>
 <p:sld xmlns:a="http://schemas.openxmlformats.org/drawingml/2006/main" xmlns:r="http://schemas.openxmlformats.org/officeDocument/2006/relationships" xmlns:p="http://schemas.openxmlformats.org/presentationml/2006/main">
   <p:cSld>
     <p:spTree>
@@ -5902,8 +5423,8 @@
         </p:nvSpPr>
         <p:spPr>
           <a:xfrm>
-            <a:off x="876982" y="100051"/>
-            <a:ext cx="10438035" cy="754053"/>
+            <a:off x="724582" y="100051"/>
+            <a:ext cx="9440497" cy="754053"/>
           </a:xfrm>
           <a:prstGeom prst="rect">
             <a:avLst/>
@@ -5919,20 +5440,14 @@
           <a:lstStyle/>
           <a:p>
             <a:r>
-              <a:rPr lang="de-DE" sz="4300" b="1" dirty="0">
+              <a:rPr lang="en-US" sz="4300" b="1" dirty="0">
                 <a:solidFill>
                   <a:srgbClr val="FF6A00"/>
                 </a:solidFill>
                 <a:latin typeface="Inter" panose="02000503000000020004" pitchFamily="2" charset="0"/>
               </a:rPr>
-              <a:t>Evaluation &amp; Perfomance Quality</a:t>
-            </a:r>
-            <a:endParaRPr lang="en-US" sz="4300" b="1" dirty="0">
-              <a:solidFill>
-                <a:srgbClr val="FF6A00"/>
-              </a:solidFill>
-              <a:latin typeface="Inter" panose="02000503000000020004" pitchFamily="2" charset="0"/>
-            </a:endParaRPr>
+              <a:t>Attack Distribution in Training  vs Attack</a:t>
+            </a:r>
           </a:p>
         </p:txBody>
       </p:sp>
@@ -6003,7 +5518,7 @@
           <a:p>
             <a:fld id="{0CE7A728-0978-4F84-B02A-B67BD1D5B964}" type="slidenum">
               <a:rPr lang="en-GB" smtClean="0"/>
-              <a:t>16</a:t>
+              <a:t>15</a:t>
             </a:fld>
             <a:endParaRPr lang="en-GB"/>
           </a:p>
@@ -6025,14 +5540,15 @@
         </p:nvPicPr>
         <p:blipFill>
           <a:blip r:embed="rId3"/>
+          <a:srcRect t="6949"/>
           <a:stretch>
             <a:fillRect/>
           </a:stretch>
         </p:blipFill>
         <p:spPr>
           <a:xfrm>
-            <a:off x="7866767" y="745135"/>
-            <a:ext cx="3886742" cy="5506218"/>
+            <a:off x="6408303" y="911807"/>
+            <a:ext cx="3886742" cy="5123593"/>
           </a:xfrm>
           <a:prstGeom prst="rect">
             <a:avLst/>
@@ -6061,88 +5577,14 @@
         </p:blipFill>
         <p:spPr>
           <a:xfrm>
-            <a:off x="2381451" y="1736488"/>
-            <a:ext cx="4077098" cy="3717656"/>
+            <a:off x="724582" y="854103"/>
+            <a:ext cx="4792298" cy="4369803"/>
           </a:xfrm>
           <a:prstGeom prst="rect">
             <a:avLst/>
           </a:prstGeom>
         </p:spPr>
       </p:pic>
-      <p:sp>
-        <p:nvSpPr>
-          <p:cNvPr id="10" name="Textfeld 9">
-            <a:extLst>
-              <a:ext uri="{FF2B5EF4-FFF2-40B4-BE49-F238E27FC236}">
-                <a16:creationId xmlns:a16="http://schemas.microsoft.com/office/drawing/2014/main" id="{32842083-2098-2F74-F12E-DFAE30E39FCA}"/>
-              </a:ext>
-            </a:extLst>
-          </p:cNvPr>
-          <p:cNvSpPr txBox="1"/>
-          <p:nvPr/>
-        </p:nvSpPr>
-        <p:spPr>
-          <a:xfrm>
-            <a:off x="239110" y="1007444"/>
-            <a:ext cx="9872208" cy="1200329"/>
-          </a:xfrm>
-          <a:prstGeom prst="rect">
-            <a:avLst/>
-          </a:prstGeom>
-          <a:noFill/>
-        </p:spPr>
-        <p:txBody>
-          <a:bodyPr wrap="square" rtlCol="0">
-            <a:spAutoFit/>
-          </a:bodyPr>
-          <a:lstStyle/>
-          <a:p>
-            <a:pPr lvl="0" eaLnBrk="0" fontAlgn="base" hangingPunct="0">
-              <a:spcBef>
-                <a:spcPct val="0"/>
-              </a:spcBef>
-              <a:spcAft>
-                <a:spcPct val="0"/>
-              </a:spcAft>
-            </a:pPr>
-            <a:r>
-              <a:rPr lang="en-US" altLang="en-US" sz="2400" b="1" dirty="0">
-                <a:latin typeface="Arial" panose="020B0604020202020204" pitchFamily="34" charset="0"/>
-                <a:sym typeface="Wingdings" panose="05000000000000000000" pitchFamily="2" charset="2"/>
-              </a:rPr>
-              <a:t>Attack Distribution in Training  vs Attack predicted</a:t>
-            </a:r>
-            <a:endParaRPr lang="en-US" altLang="en-US" sz="2400" b="1" dirty="0">
-              <a:latin typeface="Arial" panose="020B0604020202020204" pitchFamily="34" charset="0"/>
-            </a:endParaRPr>
-          </a:p>
-          <a:p>
-            <a:pPr lvl="0" eaLnBrk="0" fontAlgn="base" hangingPunct="0">
-              <a:spcBef>
-                <a:spcPct val="0"/>
-              </a:spcBef>
-              <a:spcAft>
-                <a:spcPct val="0"/>
-              </a:spcAft>
-            </a:pPr>
-            <a:endParaRPr kumimoji="0" lang="en-US" altLang="en-US" sz="2400" b="1" i="0" u="none" strike="noStrike" cap="none" normalizeH="0" baseline="0" dirty="0">
-              <a:ln>
-                <a:noFill/>
-              </a:ln>
-              <a:solidFill>
-                <a:schemeClr val="tx1"/>
-              </a:solidFill>
-              <a:effectLst/>
-              <a:latin typeface="Arial" panose="020B0604020202020204" pitchFamily="34" charset="0"/>
-            </a:endParaRPr>
-          </a:p>
-          <a:p>
-            <a:endParaRPr lang="en-US" sz="2400" dirty="0">
-              <a:latin typeface="Inter Light" panose="02000503000000020004"/>
-            </a:endParaRPr>
-          </a:p>
-        </p:txBody>
-      </p:sp>
     </p:spTree>
     <p:extLst>
       <p:ext uri="{BB962C8B-B14F-4D97-AF65-F5344CB8AC3E}">
@@ -6156,7 +5598,7 @@
 </p:sld>
 </file>
 
-<file path=ppt/slides/slide17.xml><?xml version="1.0" encoding="utf-8"?>
+<file path=ppt/slides/slide16.xml><?xml version="1.0" encoding="utf-8"?>
 <p:sld xmlns:a="http://schemas.openxmlformats.org/drawingml/2006/main" xmlns:r="http://schemas.openxmlformats.org/officeDocument/2006/relationships" xmlns:p="http://schemas.openxmlformats.org/presentationml/2006/main">
   <p:cSld>
     <p:spTree>
@@ -6565,7 +6007,7 @@
           <a:p>
             <a:fld id="{0CE7A728-0978-4F84-B02A-B67BD1D5B964}" type="slidenum">
               <a:rPr lang="en-GB" smtClean="0"/>
-              <a:t>17</a:t>
+              <a:t>16</a:t>
             </a:fld>
             <a:endParaRPr lang="en-GB"/>
           </a:p>
@@ -6584,7 +6026,7 @@
 </p:sld>
 </file>
 
-<file path=ppt/slides/slide18.xml><?xml version="1.0" encoding="utf-8"?>
+<file path=ppt/slides/slide17.xml><?xml version="1.0" encoding="utf-8"?>
 <p:sld xmlns:a="http://schemas.openxmlformats.org/drawingml/2006/main" xmlns:r="http://schemas.openxmlformats.org/officeDocument/2006/relationships" xmlns:p="http://schemas.openxmlformats.org/presentationml/2006/main">
   <p:cSld>
     <p:spTree>
@@ -6917,7 +6359,7 @@
           <a:p>
             <a:fld id="{0CE7A728-0978-4F84-B02A-B67BD1D5B964}" type="slidenum">
               <a:rPr lang="en-GB" smtClean="0"/>
-              <a:t>18</a:t>
+              <a:t>17</a:t>
             </a:fld>
             <a:endParaRPr lang="en-GB"/>
           </a:p>
@@ -6936,7 +6378,7 @@
 </p:sld>
 </file>
 
-<file path=ppt/slides/slide19.xml><?xml version="1.0" encoding="utf-8"?>
+<file path=ppt/slides/slide18.xml><?xml version="1.0" encoding="utf-8"?>
 <p:sld xmlns:a="http://schemas.openxmlformats.org/drawingml/2006/main" xmlns:r="http://schemas.openxmlformats.org/officeDocument/2006/relationships" xmlns:p="http://schemas.openxmlformats.org/presentationml/2006/main">
   <p:cSld>
     <p:spTree>
@@ -7191,7 +6633,7 @@
           <a:p>
             <a:fld id="{0CE7A728-0978-4F84-B02A-B67BD1D5B964}" type="slidenum">
               <a:rPr lang="en-GB" smtClean="0"/>
-              <a:t>19</a:t>
+              <a:t>18</a:t>
             </a:fld>
             <a:endParaRPr lang="en-GB"/>
           </a:p>
@@ -8373,7 +7815,7 @@
         <p:spPr>
           <a:xfrm>
             <a:off x="915765" y="100051"/>
-            <a:ext cx="7102819" cy="754053"/>
+            <a:ext cx="5987955" cy="754053"/>
           </a:xfrm>
           <a:prstGeom prst="rect">
             <a:avLst/>
@@ -8395,44 +7837,7 @@
                 </a:solidFill>
                 <a:latin typeface="Inter" panose="02000503000000020004" pitchFamily="2" charset="0"/>
               </a:rPr>
-              <a:t>Data Analysis &amp; Challenges</a:t>
-            </a:r>
-          </a:p>
-        </p:txBody>
-      </p:sp>
-      <p:sp>
-        <p:nvSpPr>
-          <p:cNvPr id="28" name="Textfeld 27">
-            <a:extLst>
-              <a:ext uri="{FF2B5EF4-FFF2-40B4-BE49-F238E27FC236}">
-                <a16:creationId xmlns:a16="http://schemas.microsoft.com/office/drawing/2014/main" id="{42E38597-C7C6-5831-F861-72C9B266E6B4}"/>
-              </a:ext>
-            </a:extLst>
-          </p:cNvPr>
-          <p:cNvSpPr txBox="1"/>
-          <p:nvPr/>
-        </p:nvSpPr>
-        <p:spPr>
-          <a:xfrm>
-            <a:off x="915766" y="1547274"/>
-            <a:ext cx="9872208" cy="461665"/>
-          </a:xfrm>
-          <a:prstGeom prst="rect">
-            <a:avLst/>
-          </a:prstGeom>
-          <a:noFill/>
-        </p:spPr>
-        <p:txBody>
-          <a:bodyPr wrap="square" rtlCol="0">
-            <a:spAutoFit/>
-          </a:bodyPr>
-          <a:lstStyle/>
-          <a:p>
-            <a:r>
-              <a:rPr lang="en-US" sz="2400" dirty="0">
-                <a:latin typeface="Inter Light" panose="02000503000000020004"/>
-              </a:rPr>
-              <a:t>Domain Shift and Imbalanced training Data</a:t>
+              <a:t>Imbalanced training Data</a:t>
             </a:r>
           </a:p>
         </p:txBody>
@@ -8532,7 +7937,7 @@
         </p:blipFill>
         <p:spPr>
           <a:xfrm>
-            <a:off x="150965" y="2045102"/>
+            <a:off x="915765" y="931844"/>
             <a:ext cx="9640645" cy="4420217"/>
           </a:xfrm>
           <a:prstGeom prst="rect">
